--- a/docs/free-rwe-resources/train-the-trainer/training/day-06-hades/kit/Databricks-Setup-Placeholder-Guide.pptx
+++ b/docs/free-rwe-resources/train-the-trainer/training/day-06-hades/kit/Databricks-Setup-Placeholder-Guide.pptx
@@ -13,13 +13,13 @@
     <p:sldId id="261" r:id="rId12"/>
     <p:sldId id="262" r:id="rId13"/>
     <p:sldId id="263" r:id="rId14"/>
-    <p:sldId id="264" r:id="rId15"/>
-    <p:sldId id="265" r:id="rId16"/>
-    <p:sldId id="266" r:id="rId17"/>
-    <p:sldId id="267" r:id="rId18"/>
-    <p:sldId id="268" r:id="rId19"/>
+    <p:sldId id="264" r:id="rId16"/>
+    <p:sldId id="265" r:id="rId17"/>
+    <p:sldId id="266" r:id="rId18"/>
+    <p:sldId id="267" r:id="rId19"/>
+    <p:sldId id="268" r:id="rId20"/>
   </p:sldIdLst>
-  <p:sldSz cx="9144000" cy="6858000" type="screen4x3"/>
+  <p:sldSz cx="12192000" cy="6858000" type="screen4x3"/>
   <p:notesSz cx="6858000" cy="9144000"/>
   <p:defaultTextStyle>
     <a:defPPr>
@@ -119,6 +119,426 @@
 </p:presentation>
 </file>
 
+<file path=ppt/notesMasters/notesMaster1.xml><?xml version="1.0" encoding="utf-8"?>
+<p:notesMaster xmlns:a="http://schemas.openxmlformats.org/drawingml/2006/main" xmlns:p="http://schemas.openxmlformats.org/presentationml/2006/main" xmlns:r="http://schemas.openxmlformats.org/officeDocument/2006/relationships">
+  <p:cSld>
+    <p:bg>
+      <p:bgRef idx="1001">
+        <a:schemeClr val="bg1"/>
+      </p:bgRef>
+    </p:bg>
+    <p:spTree>
+      <p:nvGrpSpPr>
+        <p:cNvPr id="1" name=""/>
+        <p:cNvGrpSpPr/>
+        <p:nvPr/>
+      </p:nvGrpSpPr>
+      <p:grpSpPr>
+        <a:xfrm>
+          <a:off x="0" y="0"/>
+          <a:ext cx="0" cy="0"/>
+          <a:chOff x="0" y="0"/>
+          <a:chExt cx="0" cy="0"/>
+        </a:xfrm>
+      </p:grpSpPr>
+      <p:sp>
+        <p:nvSpPr>
+          <p:cNvPr id="2" name="Header Placeholder 1"/>
+          <p:cNvSpPr>
+            <a:spLocks noGrp="1"/>
+          </p:cNvSpPr>
+          <p:nvPr>
+            <p:ph type="hdr" sz="quarter"/>
+          </p:nvPr>
+        </p:nvSpPr>
+        <p:spPr>
+          <a:xfrm>
+            <a:off x="0" y="0"/>
+            <a:ext cx="2971800" cy="457200"/>
+          </a:xfrm>
+          <a:prstGeom prst="rect">
+            <a:avLst/>
+          </a:prstGeom>
+        </p:spPr>
+        <p:txBody>
+          <a:bodyPr vert="horz" lIns="91440" tIns="45720" rIns="91440" bIns="45720" rtlCol="0"/>
+          <a:lstStyle>
+            <a:lvl1pPr algn="l">
+              <a:defRPr sz="1200"/>
+            </a:lvl1pPr>
+          </a:lstStyle>
+          <a:p>
+            <a:endParaRPr lang="en-US"/>
+          </a:p>
+        </p:txBody>
+      </p:sp>
+      <p:sp>
+        <p:nvSpPr>
+          <p:cNvPr id="3" name="Date Placeholder 2"/>
+          <p:cNvSpPr>
+            <a:spLocks noGrp="1"/>
+          </p:cNvSpPr>
+          <p:nvPr>
+            <p:ph type="dt" idx="1"/>
+          </p:nvPr>
+        </p:nvSpPr>
+        <p:spPr>
+          <a:xfrm>
+            <a:off x="3884613" y="0"/>
+            <a:ext cx="2971800" cy="457200"/>
+          </a:xfrm>
+          <a:prstGeom prst="rect">
+            <a:avLst/>
+          </a:prstGeom>
+        </p:spPr>
+        <p:txBody>
+          <a:bodyPr vert="horz" lIns="91440" tIns="45720" rIns="91440" bIns="45720" rtlCol="0"/>
+          <a:lstStyle>
+            <a:lvl1pPr algn="r">
+              <a:defRPr sz="1200"/>
+            </a:lvl1pPr>
+          </a:lstStyle>
+          <a:p>
+            <a:fld id="{0F89C1C7-3DCD-1040-A9CF-14679D8B5DDD}" type="datetimeFigureOut">
+              <a:rPr lang="en-US" smtClean="0"/>
+              <a:t>10/17/16</a:t>
+            </a:fld>
+            <a:endParaRPr lang="en-US"/>
+          </a:p>
+        </p:txBody>
+      </p:sp>
+      <p:sp>
+        <p:nvSpPr>
+          <p:cNvPr id="4" name="Slide Image Placeholder 3"/>
+          <p:cNvSpPr>
+            <a:spLocks noGrp="1" noRot="1" noChangeAspect="1"/>
+          </p:cNvSpPr>
+          <p:nvPr>
+            <p:ph type="sldImg" idx="2"/>
+          </p:nvPr>
+        </p:nvSpPr>
+        <p:spPr>
+          <a:xfrm>
+            <a:off x="1143000" y="685800"/>
+            <a:ext cx="4572000" cy="3429000"/>
+          </a:xfrm>
+          <a:prstGeom prst="rect">
+            <a:avLst/>
+          </a:prstGeom>
+          <a:noFill/>
+          <a:ln w="12700">
+            <a:solidFill>
+              <a:prstClr val="black"/>
+            </a:solidFill>
+          </a:ln>
+        </p:spPr>
+        <p:txBody>
+          <a:bodyPr vert="horz" lIns="91440" tIns="45720" rIns="91440" bIns="45720" rtlCol="0" anchor="ctr"/>
+          <a:lstStyle/>
+          <a:p>
+            <a:endParaRPr lang="en-US"/>
+          </a:p>
+        </p:txBody>
+      </p:sp>
+      <p:sp>
+        <p:nvSpPr>
+          <p:cNvPr id="5" name="Notes Placeholder 4"/>
+          <p:cNvSpPr>
+            <a:spLocks noGrp="1"/>
+          </p:cNvSpPr>
+          <p:nvPr>
+            <p:ph type="body" sz="quarter" idx="3"/>
+          </p:nvPr>
+        </p:nvSpPr>
+        <p:spPr>
+          <a:xfrm>
+            <a:off x="685800" y="4343400"/>
+            <a:ext cx="5486400" cy="4114800"/>
+          </a:xfrm>
+          <a:prstGeom prst="rect">
+            <a:avLst/>
+          </a:prstGeom>
+        </p:spPr>
+        <p:txBody>
+          <a:bodyPr vert="horz" lIns="91440" tIns="45720" rIns="91440" bIns="45720" rtlCol="0"/>
+          <a:lstStyle/>
+          <a:p>
+            <a:pPr lvl="0"/>
+            <a:r>
+              <a:rPr lang="en-US" smtClean="0"/>
+              <a:t>Click to edit Master text styles</a:t>
+            </a:r>
+          </a:p>
+          <a:p>
+            <a:pPr lvl="1"/>
+            <a:r>
+              <a:rPr lang="en-US" smtClean="0"/>
+              <a:t>Second level</a:t>
+            </a:r>
+          </a:p>
+          <a:p>
+            <a:pPr lvl="2"/>
+            <a:r>
+              <a:rPr lang="en-US" smtClean="0"/>
+              <a:t>Third level</a:t>
+            </a:r>
+          </a:p>
+          <a:p>
+            <a:pPr lvl="3"/>
+            <a:r>
+              <a:rPr lang="en-US" smtClean="0"/>
+              <a:t>Fourth level</a:t>
+            </a:r>
+          </a:p>
+          <a:p>
+            <a:pPr lvl="4"/>
+            <a:r>
+              <a:rPr lang="en-US" smtClean="0"/>
+              <a:t>Fifth level</a:t>
+            </a:r>
+            <a:endParaRPr lang="en-US"/>
+          </a:p>
+        </p:txBody>
+      </p:sp>
+      <p:sp>
+        <p:nvSpPr>
+          <p:cNvPr id="6" name="Footer Placeholder 5"/>
+          <p:cNvSpPr>
+            <a:spLocks noGrp="1"/>
+          </p:cNvSpPr>
+          <p:nvPr>
+            <p:ph type="ftr" sz="quarter" idx="4"/>
+          </p:nvPr>
+        </p:nvSpPr>
+        <p:spPr>
+          <a:xfrm>
+            <a:off x="0" y="8685213"/>
+            <a:ext cx="2971800" cy="457200"/>
+          </a:xfrm>
+          <a:prstGeom prst="rect">
+            <a:avLst/>
+          </a:prstGeom>
+        </p:spPr>
+        <p:txBody>
+          <a:bodyPr vert="horz" lIns="91440" tIns="45720" rIns="91440" bIns="45720" rtlCol="0" anchor="b"/>
+          <a:lstStyle>
+            <a:lvl1pPr algn="l">
+              <a:defRPr sz="1200"/>
+            </a:lvl1pPr>
+          </a:lstStyle>
+          <a:p>
+            <a:endParaRPr lang="en-US"/>
+          </a:p>
+        </p:txBody>
+      </p:sp>
+      <p:sp>
+        <p:nvSpPr>
+          <p:cNvPr id="7" name="Slide Number Placeholder 6"/>
+          <p:cNvSpPr>
+            <a:spLocks noGrp="1"/>
+          </p:cNvSpPr>
+          <p:nvPr>
+            <p:ph type="sldNum" sz="quarter" idx="5"/>
+          </p:nvPr>
+        </p:nvSpPr>
+        <p:spPr>
+          <a:xfrm>
+            <a:off x="3884613" y="8685213"/>
+            <a:ext cx="2971800" cy="457200"/>
+          </a:xfrm>
+          <a:prstGeom prst="rect">
+            <a:avLst/>
+          </a:prstGeom>
+        </p:spPr>
+        <p:txBody>
+          <a:bodyPr vert="horz" lIns="91440" tIns="45720" rIns="91440" bIns="45720" rtlCol="0" anchor="b"/>
+          <a:lstStyle>
+            <a:lvl1pPr algn="r">
+              <a:defRPr sz="1200"/>
+            </a:lvl1pPr>
+          </a:lstStyle>
+          <a:p>
+            <a:fld id="{BB5E49A5-4136-284D-997B-48E1D791AD67}" type="slidenum">
+              <a:rPr lang="en-US" smtClean="0"/>
+              <a:t>‹#›</a:t>
+            </a:fld>
+            <a:endParaRPr lang="en-US"/>
+          </a:p>
+        </p:txBody>
+      </p:sp>
+    </p:spTree>
+    <p:extLst>
+      <p:ext uri="{BB962C8B-B14F-4D97-AF65-F5344CB8AC3E}">
+        <p14:creationId xmlns:p14="http://schemas.microsoft.com/office/powerpoint/2010/main" val="2623252185"/>
+      </p:ext>
+    </p:extLst>
+  </p:cSld>
+  <p:clrMap bg1="lt1" tx1="dk1" bg2="lt2" tx2="dk2" accent1="accent1" accent2="accent2" accent3="accent3" accent4="accent4" accent5="accent5" accent6="accent6" hlink="hlink" folHlink="folHlink"/>
+  <p:notesStyle>
+    <a:lvl1pPr marL="0" algn="l" defTabSz="457200" rtl="0" eaLnBrk="1" latinLnBrk="0" hangingPunct="1">
+      <a:defRPr sz="1200" kern="1200">
+        <a:solidFill>
+          <a:schemeClr val="tx1"/>
+        </a:solidFill>
+        <a:latin typeface="+mn-lt"/>
+        <a:ea typeface="+mn-ea"/>
+        <a:cs typeface="+mn-cs"/>
+      </a:defRPr>
+    </a:lvl1pPr>
+    <a:lvl2pPr marL="457200" algn="l" defTabSz="457200" rtl="0" eaLnBrk="1" latinLnBrk="0" hangingPunct="1">
+      <a:defRPr sz="1200" kern="1200">
+        <a:solidFill>
+          <a:schemeClr val="tx1"/>
+        </a:solidFill>
+        <a:latin typeface="+mn-lt"/>
+        <a:ea typeface="+mn-ea"/>
+        <a:cs typeface="+mn-cs"/>
+      </a:defRPr>
+    </a:lvl2pPr>
+    <a:lvl3pPr marL="914400" algn="l" defTabSz="457200" rtl="0" eaLnBrk="1" latinLnBrk="0" hangingPunct="1">
+      <a:defRPr sz="1200" kern="1200">
+        <a:solidFill>
+          <a:schemeClr val="tx1"/>
+        </a:solidFill>
+        <a:latin typeface="+mn-lt"/>
+        <a:ea typeface="+mn-ea"/>
+        <a:cs typeface="+mn-cs"/>
+      </a:defRPr>
+    </a:lvl3pPr>
+    <a:lvl4pPr marL="1371600" algn="l" defTabSz="457200" rtl="0" eaLnBrk="1" latinLnBrk="0" hangingPunct="1">
+      <a:defRPr sz="1200" kern="1200">
+        <a:solidFill>
+          <a:schemeClr val="tx1"/>
+        </a:solidFill>
+        <a:latin typeface="+mn-lt"/>
+        <a:ea typeface="+mn-ea"/>
+        <a:cs typeface="+mn-cs"/>
+      </a:defRPr>
+    </a:lvl4pPr>
+    <a:lvl5pPr marL="1828800" algn="l" defTabSz="457200" rtl="0" eaLnBrk="1" latinLnBrk="0" hangingPunct="1">
+      <a:defRPr sz="1200" kern="1200">
+        <a:solidFill>
+          <a:schemeClr val="tx1"/>
+        </a:solidFill>
+        <a:latin typeface="+mn-lt"/>
+        <a:ea typeface="+mn-ea"/>
+        <a:cs typeface="+mn-cs"/>
+      </a:defRPr>
+    </a:lvl5pPr>
+    <a:lvl6pPr marL="2286000" algn="l" defTabSz="457200" rtl="0" eaLnBrk="1" latinLnBrk="0" hangingPunct="1">
+      <a:defRPr sz="1200" kern="1200">
+        <a:solidFill>
+          <a:schemeClr val="tx1"/>
+        </a:solidFill>
+        <a:latin typeface="+mn-lt"/>
+        <a:ea typeface="+mn-ea"/>
+        <a:cs typeface="+mn-cs"/>
+      </a:defRPr>
+    </a:lvl6pPr>
+    <a:lvl7pPr marL="2743200" algn="l" defTabSz="457200" rtl="0" eaLnBrk="1" latinLnBrk="0" hangingPunct="1">
+      <a:defRPr sz="1200" kern="1200">
+        <a:solidFill>
+          <a:schemeClr val="tx1"/>
+        </a:solidFill>
+        <a:latin typeface="+mn-lt"/>
+        <a:ea typeface="+mn-ea"/>
+        <a:cs typeface="+mn-cs"/>
+      </a:defRPr>
+    </a:lvl7pPr>
+    <a:lvl8pPr marL="3200400" algn="l" defTabSz="457200" rtl="0" eaLnBrk="1" latinLnBrk="0" hangingPunct="1">
+      <a:defRPr sz="1200" kern="1200">
+        <a:solidFill>
+          <a:schemeClr val="tx1"/>
+        </a:solidFill>
+        <a:latin typeface="+mn-lt"/>
+        <a:ea typeface="+mn-ea"/>
+        <a:cs typeface="+mn-cs"/>
+      </a:defRPr>
+    </a:lvl8pPr>
+    <a:lvl9pPr marL="3657600" algn="l" defTabSz="457200" rtl="0" eaLnBrk="1" latinLnBrk="0" hangingPunct="1">
+      <a:defRPr sz="1200" kern="1200">
+        <a:solidFill>
+          <a:schemeClr val="tx1"/>
+        </a:solidFill>
+        <a:latin typeface="+mn-lt"/>
+        <a:ea typeface="+mn-ea"/>
+        <a:cs typeface="+mn-cs"/>
+      </a:defRPr>
+    </a:lvl9pPr>
+  </p:notesStyle>
+</p:notesMaster>
+</file>
+
+<file path=ppt/notesSlides/notesSlide1.xml><?xml version="1.0" encoding="utf-8"?>
+<p:notes xmlns:a="http://schemas.openxmlformats.org/drawingml/2006/main" xmlns:p="http://schemas.openxmlformats.org/presentationml/2006/main" xmlns:r="http://schemas.openxmlformats.org/officeDocument/2006/relationships">
+  <p:cSld>
+    <p:spTree>
+      <p:nvGrpSpPr>
+        <p:cNvPr id="1" name=""/>
+        <p:cNvGrpSpPr/>
+        <p:nvPr/>
+      </p:nvGrpSpPr>
+      <p:grpSpPr>
+        <a:xfrm>
+          <a:off x="0" y="0"/>
+          <a:ext cx="0" cy="0"/>
+          <a:chOff x="0" y="0"/>
+          <a:chExt cx="0" cy="0"/>
+        </a:xfrm>
+      </p:grpSpPr>
+      <p:sp>
+        <p:nvSpPr>
+          <p:cNvPr id="2" name="Slide Image Placeholder 1"/>
+          <p:cNvSpPr>
+            <a:spLocks noGrp="1"/>
+          </p:cNvSpPr>
+          <p:nvPr>
+            <p:ph type="sldImg" idx="2"/>
+          </p:nvPr>
+        </p:nvSpPr>
+        <p:spPr/>
+      </p:sp>
+      <p:sp>
+        <p:nvSpPr>
+          <p:cNvPr id="3" name="Notes Placeholder 2"/>
+          <p:cNvSpPr>
+            <a:spLocks noGrp="1"/>
+          </p:cNvSpPr>
+          <p:nvPr>
+            <p:ph type="body" idx="3" sz="quarter"/>
+          </p:nvPr>
+        </p:nvSpPr>
+        <p:spPr/>
+        <p:txBody>
+          <a:bodyPr/>
+          <a:lstStyle/>
+          <a:p>
+            <a:r>
+              <a:t>This snippet is a placeholder. Many Databricks sites connect with a connectionString (a JDBC URL) plus a token instead of the server argument; ask your site which form it uses and see the DatabaseConnector documentation on connecting to a database.</a:t>
+            </a:r>
+          </a:p>
+        </p:txBody>
+      </p:sp>
+      <p:sp>
+        <p:nvSpPr>
+          <p:cNvPr id="4" name="Slide Number Placeholder 3"/>
+          <p:cNvSpPr>
+            <a:spLocks noGrp="1"/>
+          </p:cNvSpPr>
+          <p:nvPr>
+            <p:ph type="sldNum" idx="5" sz="quarter"/>
+          </p:nvPr>
+        </p:nvSpPr>
+        <p:spPr/>
+      </p:sp>
+    </p:spTree>
+  </p:cSld>
+  <p:clrMapOvr>
+    <a:masterClrMapping/>
+  </p:clrMapOvr>
+</p:notes>
+</file>
+
 <file path=ppt/slideLayouts/slideLayout1.xml><?xml version="1.0" encoding="utf-8"?>
 <p:sldLayout xmlns:a="http://schemas.openxmlformats.org/drawingml/2006/main" xmlns:r="http://schemas.openxmlformats.org/officeDocument/2006/relationships" xmlns:p="http://schemas.openxmlformats.org/presentationml/2006/main" type="title" preserve="1">
   <p:cSld name="Title Slide">
@@ -148,8 +568,8 @@
         </p:nvSpPr>
         <p:spPr>
           <a:xfrm>
-            <a:off x="685800" y="2130425"/>
-            <a:ext cx="7772400" cy="1470025"/>
+            <a:off x="914400" y="2130425"/>
+            <a:ext cx="10363200" cy="1470025"/>
           </a:xfrm>
         </p:spPr>
         <p:txBody>
@@ -176,14 +596,14 @@
         </p:nvSpPr>
         <p:spPr>
           <a:xfrm>
-            <a:off x="1371600" y="3886200"/>
-            <a:ext cx="6400800" cy="1752600"/>
+            <a:off x="1828800" y="3886200"/>
+            <a:ext cx="8534400" cy="1752600"/>
           </a:xfrm>
         </p:spPr>
         <p:txBody>
           <a:bodyPr/>
           <a:lstStyle>
-            <a:lvl1pPr marL="0" indent="0" algn="ctr">
+            <a:lvl1pPr marL="0" indent="0" algn="l">
               <a:buNone/>
               <a:defRPr>
                 <a:solidFill>
@@ -560,8 +980,8 @@
         </p:nvSpPr>
         <p:spPr>
           <a:xfrm>
-            <a:off x="6629400" y="274638"/>
-            <a:ext cx="2057400" cy="5851525"/>
+            <a:off x="8839200" y="274638"/>
+            <a:ext cx="2743200" cy="5851525"/>
           </a:xfrm>
         </p:spPr>
         <p:txBody>
@@ -588,8 +1008,8 @@
         </p:nvSpPr>
         <p:spPr>
           <a:xfrm>
-            <a:off x="457200" y="274638"/>
-            <a:ext cx="6019800" cy="5851525"/>
+            <a:off x="609600" y="274638"/>
+            <a:ext cx="8026400" cy="5851525"/>
           </a:xfrm>
         </p:spPr>
         <p:txBody>
@@ -910,46 +1330,46 @@
         </p:nvSpPr>
         <p:spPr>
           <a:xfrm>
-            <a:off x="722313" y="4406900"/>
-            <a:ext cx="7772400" cy="1362075"/>
+            <a:off x="963084" y="1920240"/>
+            <a:ext cx="10363200" cy="1280160"/>
           </a:xfrm>
         </p:spPr>
         <p:txBody>
+          <a:bodyPr anchor="b"/>
+          <a:lstStyle>
+            <a:lvl1pPr algn="l">
+              <a:defRPr sz="4000" b="1"/>
+            </a:lvl1pPr>
+          </a:lstStyle>
+          <a:p>
+            <a:r>
+              <a:rPr lang="en-US" smtClean="0"/>
+              <a:t>Click to edit Master title style</a:t>
+            </a:r>
+            <a:endParaRPr lang="en-US"/>
+          </a:p>
+        </p:txBody>
+      </p:sp>
+      <p:sp>
+        <p:nvSpPr>
+          <p:cNvPr id="3" name="Text Placeholder 2"/>
+          <p:cNvSpPr>
+            <a:spLocks noGrp="1"/>
+          </p:cNvSpPr>
+          <p:nvPr>
+            <p:ph type="body" idx="1"/>
+          </p:nvPr>
+        </p:nvSpPr>
+        <p:spPr>
+          <a:xfrm>
+            <a:off x="963084" y="3291840"/>
+            <a:ext cx="10363200" cy="1828800"/>
+          </a:xfrm>
+        </p:spPr>
+        <p:txBody>
           <a:bodyPr anchor="t"/>
           <a:lstStyle>
-            <a:lvl1pPr algn="l">
-              <a:defRPr sz="4000" b="1" cap="all"/>
-            </a:lvl1pPr>
-          </a:lstStyle>
-          <a:p>
-            <a:r>
-              <a:rPr lang="en-US" smtClean="0"/>
-              <a:t>Click to edit Master title style</a:t>
-            </a:r>
-            <a:endParaRPr lang="en-US"/>
-          </a:p>
-        </p:txBody>
-      </p:sp>
-      <p:sp>
-        <p:nvSpPr>
-          <p:cNvPr id="3" name="Text Placeholder 2"/>
-          <p:cNvSpPr>
-            <a:spLocks noGrp="1"/>
-          </p:cNvSpPr>
-          <p:nvPr>
-            <p:ph type="body" idx="1"/>
-          </p:nvPr>
-        </p:nvSpPr>
-        <p:spPr>
-          <a:xfrm>
-            <a:off x="722313" y="2906713"/>
-            <a:ext cx="7772400" cy="1500187"/>
-          </a:xfrm>
-        </p:spPr>
-        <p:txBody>
-          <a:bodyPr anchor="b"/>
-          <a:lstStyle>
-            <a:lvl1pPr marL="0" indent="0">
+            <a:lvl1pPr marL="0" indent="0" algn="l">
               <a:buNone/>
               <a:defRPr sz="2000">
                 <a:solidFill>
@@ -1041,7 +1461,7 @@
             </a:lvl9pPr>
           </a:lstStyle>
           <a:p>
-            <a:pPr lvl="0"/>
+            <a:pPr lvl="0" algn="l"/>
             <a:r>
               <a:rPr lang="en-US" smtClean="0"/>
               <a:t>Click to edit Master text styles</a:t>
@@ -1179,8 +1599,8 @@
         </p:nvSpPr>
         <p:spPr>
           <a:xfrm>
-            <a:off x="457200" y="1600200"/>
-            <a:ext cx="4038600" cy="4525963"/>
+            <a:off x="609600" y="1600200"/>
+            <a:ext cx="5384800" cy="4525963"/>
           </a:xfrm>
         </p:spPr>
         <p:txBody>
@@ -1264,8 +1684,8 @@
         </p:nvSpPr>
         <p:spPr>
           <a:xfrm>
-            <a:off x="4648200" y="1600200"/>
-            <a:ext cx="4038600" cy="4525963"/>
+            <a:off x="6197600" y="1600200"/>
+            <a:ext cx="5384800" cy="4525963"/>
           </a:xfrm>
         </p:spPr>
         <p:txBody>
@@ -1471,8 +1891,8 @@
         </p:nvSpPr>
         <p:spPr>
           <a:xfrm>
-            <a:off x="457200" y="1535113"/>
-            <a:ext cx="4040188" cy="639762"/>
+            <a:off x="609600" y="1535113"/>
+            <a:ext cx="5386917" cy="639762"/>
           </a:xfrm>
         </p:spPr>
         <p:txBody>
@@ -1536,8 +1956,8 @@
         </p:nvSpPr>
         <p:spPr>
           <a:xfrm>
-            <a:off x="457200" y="2174875"/>
-            <a:ext cx="4040188" cy="3951288"/>
+            <a:off x="609600" y="2174875"/>
+            <a:ext cx="5386917" cy="3951288"/>
           </a:xfrm>
         </p:spPr>
         <p:txBody>
@@ -1621,8 +2041,8 @@
         </p:nvSpPr>
         <p:spPr>
           <a:xfrm>
-            <a:off x="4645025" y="1535113"/>
-            <a:ext cx="4041775" cy="639762"/>
+            <a:off x="6193366" y="1535113"/>
+            <a:ext cx="5389033" cy="639762"/>
           </a:xfrm>
         </p:spPr>
         <p:txBody>
@@ -1686,8 +2106,8 @@
         </p:nvSpPr>
         <p:spPr>
           <a:xfrm>
-            <a:off x="4645025" y="2174875"/>
-            <a:ext cx="4041775" cy="3951288"/>
+            <a:off x="6193366" y="2174875"/>
+            <a:ext cx="5389033" cy="3951288"/>
           </a:xfrm>
         </p:spPr>
         <p:txBody>
@@ -2079,8 +2499,8 @@
         </p:nvSpPr>
         <p:spPr>
           <a:xfrm>
-            <a:off x="457200" y="273050"/>
-            <a:ext cx="3008313" cy="1162050"/>
+            <a:off x="609600" y="273050"/>
+            <a:ext cx="4011084" cy="1162050"/>
           </a:xfrm>
         </p:spPr>
         <p:txBody>
@@ -2111,8 +2531,8 @@
         </p:nvSpPr>
         <p:spPr>
           <a:xfrm>
-            <a:off x="3575050" y="273050"/>
-            <a:ext cx="5111750" cy="5853113"/>
+            <a:off x="4766733" y="273050"/>
+            <a:ext cx="6815666" cy="5853113"/>
           </a:xfrm>
         </p:spPr>
         <p:txBody>
@@ -2196,8 +2616,8 @@
         </p:nvSpPr>
         <p:spPr>
           <a:xfrm>
-            <a:off x="457200" y="1435100"/>
-            <a:ext cx="3008313" cy="4691063"/>
+            <a:off x="609600" y="1435100"/>
+            <a:ext cx="4011084" cy="4691063"/>
           </a:xfrm>
         </p:spPr>
         <p:txBody>
@@ -2356,8 +2776,8 @@
         </p:nvSpPr>
         <p:spPr>
           <a:xfrm>
-            <a:off x="1792288" y="4800600"/>
-            <a:ext cx="5486400" cy="566738"/>
+            <a:off x="2389717" y="4800600"/>
+            <a:ext cx="7315200" cy="566738"/>
           </a:xfrm>
         </p:spPr>
         <p:txBody>
@@ -2388,8 +2808,8 @@
         </p:nvSpPr>
         <p:spPr>
           <a:xfrm>
-            <a:off x="1792288" y="612775"/>
-            <a:ext cx="5486400" cy="4114800"/>
+            <a:off x="2389717" y="612775"/>
+            <a:ext cx="7315200" cy="4114800"/>
           </a:xfrm>
         </p:spPr>
         <p:txBody>
@@ -2449,8 +2869,8 @@
         </p:nvSpPr>
         <p:spPr>
           <a:xfrm>
-            <a:off x="1792288" y="5367338"/>
-            <a:ext cx="5486400" cy="804862"/>
+            <a:off x="2389717" y="5367338"/>
+            <a:ext cx="7315200" cy="804862"/>
           </a:xfrm>
         </p:spPr>
         <p:txBody>
@@ -2614,8 +3034,8 @@
         </p:nvSpPr>
         <p:spPr>
           <a:xfrm>
-            <a:off x="457200" y="274638"/>
-            <a:ext cx="8229600" cy="1143000"/>
+            <a:off x="609600" y="274638"/>
+            <a:ext cx="10972800" cy="1143000"/>
           </a:xfrm>
           <a:prstGeom prst="rect">
             <a:avLst/>
@@ -2647,8 +3067,8 @@
         </p:nvSpPr>
         <p:spPr>
           <a:xfrm>
-            <a:off x="457200" y="1600200"/>
-            <a:ext cx="8229600" cy="4525963"/>
+            <a:off x="609600" y="1600200"/>
+            <a:ext cx="10972800" cy="4525963"/>
           </a:xfrm>
           <a:prstGeom prst="rect">
             <a:avLst/>
@@ -2709,8 +3129,8 @@
         </p:nvSpPr>
         <p:spPr>
           <a:xfrm>
-            <a:off x="457200" y="6356350"/>
-            <a:ext cx="2133600" cy="365125"/>
+            <a:off x="609600" y="6356350"/>
+            <a:ext cx="2844800" cy="365125"/>
           </a:xfrm>
           <a:prstGeom prst="rect">
             <a:avLst/>
@@ -2750,8 +3170,8 @@
         </p:nvSpPr>
         <p:spPr>
           <a:xfrm>
-            <a:off x="3124200" y="6356350"/>
-            <a:ext cx="2895600" cy="365125"/>
+            <a:off x="4165600" y="6356350"/>
+            <a:ext cx="3860800" cy="365125"/>
           </a:xfrm>
           <a:prstGeom prst="rect">
             <a:avLst/>
@@ -2787,8 +3207,8 @@
         </p:nvSpPr>
         <p:spPr>
           <a:xfrm>
-            <a:off x="6553200" y="6356350"/>
-            <a:ext cx="2133600" cy="365125"/>
+            <a:off x="8737600" y="6356350"/>
+            <a:ext cx="2844800" cy="365125"/>
           </a:xfrm>
           <a:prstGeom prst="rect">
             <a:avLst/>
@@ -2816,30 +3236,6 @@
           </a:p>
         </p:txBody>
       </p:sp>
-      <p:pic>
-        <p:nvPicPr>
-          <p:cNvPr id="9901" name="ALS TDI Logo"/>
-          <p:cNvPicPr>
-            <a:picLocks noChangeAspect="1"/>
-          </p:cNvPicPr>
-          <p:nvPr/>
-        </p:nvPicPr>
-        <p:blipFill>
-          <a:blip r:embed="rId13"/>
-          <a:stretch>
-            <a:fillRect/>
-          </a:stretch>
-        </p:blipFill>
-        <p:spPr>
-          <a:xfrm>
-            <a:off x="8065008" y="6043049"/>
-            <a:ext cx="914400" cy="705223"/>
-          </a:xfrm>
-          <a:prstGeom prst="rect">
-            <a:avLst/>
-          </a:prstGeom>
-        </p:spPr>
-      </p:pic>
     </p:spTree>
     <p:extLst>
       <p:ext uri="{BB962C8B-B14F-4D97-AF65-F5344CB8AC3E}">
@@ -2863,12 +3259,12 @@
   </p:sldLayoutIdLst>
   <p:txStyles>
     <p:titleStyle>
-      <a:lvl1pPr algn="ctr" defTabSz="457200" rtl="0" eaLnBrk="1" latinLnBrk="0" hangingPunct="1">
+      <a:lvl1pPr algn="l" defTabSz="457200" rtl="0" eaLnBrk="1" latinLnBrk="0" hangingPunct="1">
         <a:spcBef>
           <a:spcPct val="0"/>
         </a:spcBef>
         <a:buNone/>
-        <a:defRPr sz="4400" kern="1200">
+        <a:defRPr sz="3200" kern="1200" b="1">
           <a:solidFill>
             <a:schemeClr val="tx1"/>
           </a:solidFill>
@@ -2885,7 +3281,7 @@
         </a:spcBef>
         <a:buFont typeface="Arial"/>
         <a:buChar char="•"/>
-        <a:defRPr sz="3200" kern="1200">
+        <a:defRPr sz="2000" kern="1200">
           <a:solidFill>
             <a:schemeClr val="tx1"/>
           </a:solidFill>
@@ -2900,7 +3296,7 @@
         </a:spcBef>
         <a:buFont typeface="Arial"/>
         <a:buChar char="–"/>
-        <a:defRPr sz="2800" kern="1200">
+        <a:defRPr sz="1800" kern="1200">
           <a:solidFill>
             <a:schemeClr val="tx1"/>
           </a:solidFill>
@@ -2915,7 +3311,7 @@
         </a:spcBef>
         <a:buFont typeface="Arial"/>
         <a:buChar char="•"/>
-        <a:defRPr sz="2400" kern="1200">
+        <a:defRPr sz="1600" kern="1200">
           <a:solidFill>
             <a:schemeClr val="tx1"/>
           </a:solidFill>
@@ -2930,7 +3326,7 @@
         </a:spcBef>
         <a:buFont typeface="Arial"/>
         <a:buChar char="–"/>
-        <a:defRPr sz="2000" kern="1200">
+        <a:defRPr sz="1400" kern="1200">
           <a:solidFill>
             <a:schemeClr val="tx1"/>
           </a:solidFill>
@@ -2945,7 +3341,7 @@
         </a:spcBef>
         <a:buFont typeface="Arial"/>
         <a:buChar char="»"/>
-        <a:defRPr sz="2000" kern="1200">
+        <a:defRPr sz="1400" kern="1200">
           <a:solidFill>
             <a:schemeClr val="tx1"/>
           </a:solidFill>
@@ -3131,7 +3527,7 @@
             <a:spLocks noGrp="1"/>
           </p:cNvSpPr>
           <p:nvPr>
-            <p:ph type="title"/>
+            <p:ph type="ctrTitle"/>
           </p:nvPr>
         </p:nvSpPr>
         <p:spPr/>
@@ -3147,24 +3543,30 @@
       </p:sp>
       <p:sp>
         <p:nvSpPr>
-          <p:cNvPr id="3" name="Content Placeholder 2"/>
-          <p:cNvSpPr>
-            <a:spLocks noGrp="1"/>
-          </p:cNvSpPr>
-          <p:nvPr>
-            <p:ph idx="1"/>
-          </p:nvPr>
-        </p:nvSpPr>
-        <p:spPr/>
-        <p:txBody>
-          <a:bodyPr/>
-          <a:lstStyle/>
-          <a:p>
-            <a:r>
-              <a:t>Week 2 – HADES Training</a:t>
-            </a:r>
-          </a:p>
-          <a:p>
+          <p:cNvPr id="3" name="Subtitle 2"/>
+          <p:cNvSpPr>
+            <a:spLocks noGrp="1"/>
+          </p:cNvSpPr>
+          <p:nvPr>
+            <p:ph type="subTitle" idx="1"/>
+          </p:nvPr>
+        </p:nvSpPr>
+        <p:spPr/>
+        <p:txBody>
+          <a:bodyPr/>
+          <a:lstStyle/>
+          <a:p>
+            <a:pPr marL="0" indent="0">
+              <a:buNone/>
+            </a:pPr>
+            <a:r>
+              <a:t>Day 6 (Parts 1 and 2) – HADES Training</a:t>
+            </a:r>
+          </a:p>
+          <a:p>
+            <a:pPr marL="0" indent="0">
+              <a:buNone/>
+            </a:pPr>
             <a:r>
               <a:t>Institution-Specific Details TBD</a:t>
             </a:r>
@@ -3225,23 +3627,31 @@
           <a:bodyPr/>
           <a:lstStyle/>
           <a:p>
-            <a:r>
-              <a:t>- Permission denied (schema)</a:t>
-            </a:r>
-          </a:p>
-          <a:p>
-            <a:r>
-              <a:t>- Network restrictions</a:t>
-            </a:r>
-          </a:p>
-          <a:p>
-            <a:r>
-              <a:t>- Missing JDBC/ODBC drivers</a:t>
-            </a:r>
-          </a:p>
-          <a:p>
-            <a:r>
-              <a:t>- Token expired</a:t>
+            <a:pPr/>
+            <a:r>
+              <a:rPr sz="2400"/>
+              <a:t>Permission denied (schema)</a:t>
+            </a:r>
+          </a:p>
+          <a:p>
+            <a:pPr/>
+            <a:r>
+              <a:rPr sz="2400"/>
+              <a:t>Network restrictions</a:t>
+            </a:r>
+          </a:p>
+          <a:p>
+            <a:pPr/>
+            <a:r>
+              <a:rPr sz="2400"/>
+              <a:t>Missing JDBC/ODBC drivers</a:t>
+            </a:r>
+          </a:p>
+          <a:p>
+            <a:pPr/>
+            <a:r>
+              <a:rPr sz="2400"/>
+              <a:t>Token expired</a:t>
             </a:r>
           </a:p>
         </p:txBody>
@@ -3300,22 +3710,38 @@
           <a:bodyPr/>
           <a:lstStyle/>
           <a:p>
-            <a:r>
+            <a:pPr marL="0" indent="0">
+              <a:buNone/>
+            </a:pPr>
+            <a:r>
+              <a:rPr sz="2400"/>
               <a:t>If you can’t connect:</a:t>
             </a:r>
           </a:p>
           <a:p>
-            <a:r>
+            <a:pPr marL="0" indent="0">
+              <a:buNone/>
+            </a:pPr>
+            <a:r>
+              <a:rPr sz="2400"/>
               <a:t>1. Do not debug credentials live</a:t>
             </a:r>
           </a:p>
           <a:p>
-            <a:r>
+            <a:pPr marL="0" indent="0">
+              <a:buNone/>
+            </a:pPr>
+            <a:r>
+              <a:rPr sz="2400"/>
               <a:t>2. Confirm placeholders</a:t>
             </a:r>
           </a:p>
           <a:p>
-            <a:r>
+            <a:pPr marL="0" indent="0">
+              <a:buNone/>
+            </a:pPr>
+            <a:r>
+              <a:rPr sz="2400"/>
               <a:t>3. Escalate to institutional support</a:t>
             </a:r>
           </a:p>
@@ -3375,18 +3801,24 @@
           <a:bodyPr/>
           <a:lstStyle/>
           <a:p>
-            <a:r>
-              <a:t>- OMOP CDM is available</a:t>
-            </a:r>
-          </a:p>
-          <a:p>
-            <a:r>
-              <a:t>- Cohorts exist OR can be imported</a:t>
-            </a:r>
-          </a:p>
-          <a:p>
-            <a:r>
-              <a:t>- Results schema is writable</a:t>
+            <a:pPr/>
+            <a:r>
+              <a:rPr sz="2400"/>
+              <a:t>OMOP CDM is available</a:t>
+            </a:r>
+          </a:p>
+          <a:p>
+            <a:pPr/>
+            <a:r>
+              <a:rPr sz="2400"/>
+              <a:t>Cohorts exist OR can be imported</a:t>
+            </a:r>
+          </a:p>
+          <a:p>
+            <a:pPr/>
+            <a:r>
+              <a:rPr sz="2400"/>
+              <a:t>Results schema is writable</a:t>
             </a:r>
           </a:p>
         </p:txBody>
@@ -3432,19 +3864,22 @@
       </p:sp>
       <p:sp>
         <p:nvSpPr>
-          <p:cNvPr id="3" name="Content Placeholder 2"/>
-          <p:cNvSpPr>
-            <a:spLocks noGrp="1"/>
-          </p:cNvSpPr>
-          <p:nvPr>
-            <p:ph idx="1"/>
-          </p:nvPr>
-        </p:nvSpPr>
-        <p:spPr/>
-        <p:txBody>
-          <a:bodyPr/>
-          <a:lstStyle/>
-          <a:p>
+          <p:cNvPr id="3" name="Text Placeholder 2"/>
+          <p:cNvSpPr>
+            <a:spLocks noGrp="1"/>
+          </p:cNvSpPr>
+          <p:nvPr>
+            <p:ph type="body" idx="1"/>
+          </p:nvPr>
+        </p:nvSpPr>
+        <p:spPr/>
+        <p:txBody>
+          <a:bodyPr/>
+          <a:lstStyle/>
+          <a:p>
+            <a:pPr marL="0" indent="0">
+              <a:buNone/>
+            </a:pPr>
             <a:r>
               <a:t>Once you have your institutional details, replace placeholders and rerun the workbook steps.</a:t>
             </a:r>
@@ -3505,18 +3940,24 @@
           <a:bodyPr/>
           <a:lstStyle/>
           <a:p>
-            <a:r>
-              <a:t>- Provide a standard secure access pattern</a:t>
-            </a:r>
-          </a:p>
-          <a:p>
-            <a:r>
-              <a:t>- Use placeholders for institutional configuration</a:t>
-            </a:r>
-          </a:p>
-          <a:p>
-            <a:r>
-              <a:t>- Prevent credential sharing in code</a:t>
+            <a:pPr/>
+            <a:r>
+              <a:rPr sz="2400"/>
+              <a:t>Provide a standard secure access pattern</a:t>
+            </a:r>
+          </a:p>
+          <a:p>
+            <a:pPr/>
+            <a:r>
+              <a:rPr sz="2400"/>
+              <a:t>Use placeholders for institutional configuration</a:t>
+            </a:r>
+          </a:p>
+          <a:p>
+            <a:pPr/>
+            <a:r>
+              <a:rPr sz="2400"/>
+              <a:t>Prevent credential sharing in code</a:t>
             </a:r>
           </a:p>
         </p:txBody>
@@ -3575,13 +4016,16 @@
           <a:bodyPr/>
           <a:lstStyle/>
           <a:p>
-            <a:r>
+            <a:pPr/>
+            <a:r>
+              <a:rPr sz="2400"/>
               <a:t>User → Secure R environment (RStudio/Workbench) → Databricks/Spark → OMOP CDM</a:t>
             </a:r>
           </a:p>
-          <a:p/>
-          <a:p>
-            <a:r>
+          <a:p>
+            <a:pPr/>
+            <a:r>
+              <a:rPr sz="2400"/>
               <a:t>All access is controlled by institutional security.</a:t>
             </a:r>
           </a:p>
@@ -3641,28 +4085,38 @@
           <a:bodyPr/>
           <a:lstStyle/>
           <a:p>
-            <a:r>
-              <a:t>- Databricks server/host</a:t>
-            </a:r>
-          </a:p>
-          <a:p>
-            <a:r>
-              <a:t>- Authentication method (token/SSO)</a:t>
-            </a:r>
-          </a:p>
-          <a:p>
-            <a:r>
-              <a:t>- CDM schema name</a:t>
-            </a:r>
-          </a:p>
-          <a:p>
-            <a:r>
-              <a:t>- Results/work schema name</a:t>
-            </a:r>
-          </a:p>
-          <a:p>
-            <a:r>
-              <a:t>- Cohort schema and IDs (if prebuilt)</a:t>
+            <a:pPr/>
+            <a:r>
+              <a:rPr sz="2400"/>
+              <a:t>Databricks server/host</a:t>
+            </a:r>
+          </a:p>
+          <a:p>
+            <a:pPr/>
+            <a:r>
+              <a:rPr sz="2400"/>
+              <a:t>Authentication method (token/SSO)</a:t>
+            </a:r>
+          </a:p>
+          <a:p>
+            <a:pPr/>
+            <a:r>
+              <a:rPr sz="2400"/>
+              <a:t>CDM schema name</a:t>
+            </a:r>
+          </a:p>
+          <a:p>
+            <a:pPr/>
+            <a:r>
+              <a:rPr sz="2400"/>
+              <a:t>Results/work schema name</a:t>
+            </a:r>
+          </a:p>
+          <a:p>
+            <a:pPr/>
+            <a:r>
+              <a:rPr sz="2400"/>
+              <a:t>Cohort schema and IDs (if prebuilt)</a:t>
             </a:r>
           </a:p>
         </p:txBody>
@@ -3721,32 +4175,44 @@
           <a:bodyPr/>
           <a:lstStyle/>
           <a:p>
-            <a:r>
+            <a:pPr/>
+            <a:r>
+              <a:rPr sz="2400"/>
               <a:t>&lt;DATABRICKS_SERVER&gt;</a:t>
             </a:r>
           </a:p>
           <a:p>
-            <a:r>
+            <a:pPr/>
+            <a:r>
+              <a:rPr sz="2400"/>
               <a:t>&lt;CDM_SCHEMA&gt;</a:t>
             </a:r>
           </a:p>
           <a:p>
-            <a:r>
+            <a:pPr/>
+            <a:r>
+              <a:rPr sz="2400"/>
               <a:t>&lt;RESULTS_SCHEMA&gt;</a:t>
             </a:r>
           </a:p>
           <a:p>
-            <a:r>
+            <a:pPr/>
+            <a:r>
+              <a:rPr sz="2400"/>
               <a:t>&lt;COHORT_SCHEMA&gt;</a:t>
             </a:r>
           </a:p>
           <a:p>
-            <a:r>
+            <a:pPr/>
+            <a:r>
+              <a:rPr sz="2400"/>
               <a:t>&lt;TARGET_ID&gt;</a:t>
             </a:r>
           </a:p>
           <a:p>
-            <a:r>
+            <a:pPr/>
+            <a:r>
+              <a:rPr sz="2400"/>
               <a:t>&lt;OUTCOME_ID&gt;</a:t>
             </a:r>
           </a:p>
@@ -3806,18 +4272,24 @@
           <a:bodyPr/>
           <a:lstStyle/>
           <a:p>
-            <a:r>
-              <a:t>- Never hardcode credentials in scripts</a:t>
-            </a:r>
-          </a:p>
-          <a:p>
-            <a:r>
-              <a:t>- Use environment variables or secret scopes</a:t>
-            </a:r>
-          </a:p>
-          <a:p>
-            <a:r>
-              <a:t>- Do not paste tokens into shared docs</a:t>
+            <a:pPr/>
+            <a:r>
+              <a:rPr sz="2400"/>
+              <a:t>Never hardcode credentials in scripts</a:t>
+            </a:r>
+          </a:p>
+          <a:p>
+            <a:pPr/>
+            <a:r>
+              <a:rPr sz="2400"/>
+              <a:t>Use environment variables or secret scopes</a:t>
+            </a:r>
+          </a:p>
+          <a:p>
+            <a:pPr/>
+            <a:r>
+              <a:rPr sz="2400"/>
+              <a:t>Do not paste tokens into shared docs</a:t>
             </a:r>
           </a:p>
         </p:txBody>
@@ -3876,27 +4348,47 @@
           <a:bodyPr/>
           <a:lstStyle/>
           <a:p>
-            <a:r>
+            <a:pPr marL="0" indent="0">
+              <a:buNone/>
+            </a:pPr>
+            <a:r>
+              <a:rPr sz="2400"/>
               <a:t>1. Load DatabaseConnector</a:t>
             </a:r>
           </a:p>
           <a:p>
-            <a:r>
+            <a:pPr marL="0" indent="0">
+              <a:buNone/>
+            </a:pPr>
+            <a:r>
+              <a:rPr sz="2400"/>
               <a:t>2. Create connectionDetails</a:t>
             </a:r>
           </a:p>
           <a:p>
-            <a:r>
+            <a:pPr marL="0" indent="0">
+              <a:buNone/>
+            </a:pPr>
+            <a:r>
+              <a:rPr sz="2400"/>
               <a:t>3. Connect</a:t>
             </a:r>
           </a:p>
           <a:p>
-            <a:r>
+            <a:pPr marL="0" indent="0">
+              <a:buNone/>
+            </a:pPr>
+            <a:r>
+              <a:rPr sz="2400"/>
               <a:t>4. Run queries / analytics</a:t>
             </a:r>
           </a:p>
           <a:p>
-            <a:r>
+            <a:pPr marL="0" indent="0">
+              <a:buNone/>
+            </a:pPr>
+            <a:r>
+              <a:rPr sz="2400"/>
               <a:t>5. Disconnect</a:t>
             </a:r>
           </a:p>
@@ -3956,32 +4448,68 @@
           <a:bodyPr/>
           <a:lstStyle/>
           <a:p>
-            <a:r>
+            <a:pPr marL="0" indent="0">
+              <a:buNone/>
+            </a:pPr>
+            <a:r>
+              <a:rPr sz="1600">
+                <a:latin typeface="Courier New"/>
+              </a:rPr>
               <a:t>connectionDetails &lt;- DatabaseConnector::createConnectionDetails(</a:t>
             </a:r>
           </a:p>
           <a:p>
-            <a:r>
+            <a:pPr marL="0" indent="0">
+              <a:buNone/>
+            </a:pPr>
+            <a:r>
+              <a:rPr sz="1600">
+                <a:latin typeface="Courier New"/>
+              </a:rPr>
               <a:t>  dbms = "spark",</a:t>
             </a:r>
           </a:p>
           <a:p>
-            <a:r>
+            <a:pPr marL="0" indent="0">
+              <a:buNone/>
+            </a:pPr>
+            <a:r>
+              <a:rPr sz="1600">
+                <a:latin typeface="Courier New"/>
+              </a:rPr>
               <a:t>  server = "&lt;DATABRICKS_SERVER&gt;",</a:t>
             </a:r>
           </a:p>
           <a:p>
-            <a:r>
+            <a:pPr marL="0" indent="0">
+              <a:buNone/>
+            </a:pPr>
+            <a:r>
+              <a:rPr sz="1600">
+                <a:latin typeface="Courier New"/>
+              </a:rPr>
               <a:t>  user = "&lt;USER_OR_TOKEN&gt;",</a:t>
             </a:r>
           </a:p>
           <a:p>
-            <a:r>
+            <a:pPr marL="0" indent="0">
+              <a:buNone/>
+            </a:pPr>
+            <a:r>
+              <a:rPr sz="1600">
+                <a:latin typeface="Courier New"/>
+              </a:rPr>
               <a:t>  password = "&lt;TOKEN&gt;"</a:t>
             </a:r>
           </a:p>
           <a:p>
-            <a:r>
+            <a:pPr marL="0" indent="0">
+              <a:buNone/>
+            </a:pPr>
+            <a:r>
+              <a:rPr sz="1600">
+                <a:latin typeface="Courier New"/>
+              </a:rPr>
               <a:t>)</a:t>
             </a:r>
           </a:p>
@@ -4041,23 +4569,33 @@
           <a:bodyPr/>
           <a:lstStyle/>
           <a:p>
-            <a:r>
+            <a:pPr marL="0" indent="0">
+              <a:buNone/>
+            </a:pPr>
+            <a:r>
+              <a:rPr sz="2400"/>
               <a:t>Basic checks:</a:t>
             </a:r>
           </a:p>
           <a:p>
-            <a:r>
-              <a:t>- Can you connect?</a:t>
-            </a:r>
-          </a:p>
-          <a:p>
-            <a:r>
-              <a:t>- Can you query CDM tables?</a:t>
-            </a:r>
-          </a:p>
-          <a:p>
-            <a:r>
-              <a:t>- Do you have write access to results schema?</a:t>
+            <a:pPr/>
+            <a:r>
+              <a:rPr sz="2400"/>
+              <a:t>Can you connect?</a:t>
+            </a:r>
+          </a:p>
+          <a:p>
+            <a:pPr/>
+            <a:r>
+              <a:rPr sz="2400"/>
+              <a:t>Can you query CDM tables?</a:t>
+            </a:r>
+          </a:p>
+          <a:p>
+            <a:pPr/>
+            <a:r>
+              <a:rPr sz="2400"/>
+              <a:t>Do you have write access to results schema?</a:t>
             </a:r>
           </a:p>
         </p:txBody>
@@ -4073,7 +4611,7 @@
 <file path=ppt/theme/theme1.xml><?xml version="1.0" encoding="utf-8"?>
 <a:theme xmlns:a="http://schemas.openxmlformats.org/drawingml/2006/main" name="Office Theme">
   <a:themeElements>
-    <a:clrScheme name="ALS TDI">
+    <a:clrScheme name="Office">
       <a:dk1>
         <a:sysClr val="windowText" lastClr="000000"/>
       </a:dk1>
@@ -4081,39 +4619,359 @@
         <a:sysClr val="window" lastClr="FFFFFF"/>
       </a:lt1>
       <a:dk2>
-        <a:srgbClr val="6D2F77"/>
+        <a:srgbClr val="262626"/>
       </a:dk2>
       <a:lt2>
-        <a:srgbClr val="F2EAF4"/>
+        <a:srgbClr val="F2F2F2"/>
       </a:lt2>
       <a:accent1>
-        <a:srgbClr val="904199"/>
+        <a:srgbClr val="404040"/>
       </a:accent1>
       <a:accent2>
-        <a:srgbClr val="B872C0"/>
+        <a:srgbClr val="7F7F7F"/>
       </a:accent2>
       <a:accent3>
-        <a:srgbClr val="6D2F77"/>
+        <a:srgbClr val="A6A6A6"/>
       </a:accent3>
       <a:accent4>
-        <a:srgbClr val="4A4A4A"/>
+        <a:srgbClr val="595959"/>
       </a:accent4>
       <a:accent5>
-        <a:srgbClr val="D9C2DE"/>
+        <a:srgbClr val="BFBFBF"/>
       </a:accent5>
       <a:accent6>
-        <a:srgbClr val="7A3580"/>
+        <a:srgbClr val="262626"/>
       </a:accent6>
       <a:hlink>
-        <a:srgbClr val="904199"/>
+        <a:srgbClr val="000000"/>
       </a:hlink>
       <a:folHlink>
-        <a:srgbClr val="6D2F77"/>
+        <a:srgbClr val="404040"/>
       </a:folHlink>
     </a:clrScheme>
     <a:fontScheme name="Office">
       <a:majorFont>
-        <a:latin typeface="EB Garamond"/>
+        <a:latin typeface="Calibri"/>
+        <a:ea typeface=""/>
+        <a:cs typeface=""/>
+        <a:font script="Jpan" typeface="ＭＳ Ｐゴシック"/>
+        <a:font script="Hang" typeface="맑은 고딕"/>
+        <a:font script="Hans" typeface="宋体"/>
+        <a:font script="Hant" typeface="新細明體"/>
+        <a:font script="Arab" typeface="Times New Roman"/>
+        <a:font script="Hebr" typeface="Times New Roman"/>
+        <a:font script="Thai" typeface="Angsana New"/>
+        <a:font script="Ethi" typeface="Nyala"/>
+        <a:font script="Beng" typeface="Vrinda"/>
+        <a:font script="Gujr" typeface="Shruti"/>
+        <a:font script="Khmr" typeface="MoolBoran"/>
+        <a:font script="Knda" typeface="Tunga"/>
+        <a:font script="Guru" typeface="Raavi"/>
+        <a:font script="Cans" typeface="Euphemia"/>
+        <a:font script="Cher" typeface="Plantagenet Cherokee"/>
+        <a:font script="Yiii" typeface="Microsoft Yi Baiti"/>
+        <a:font script="Tibt" typeface="Microsoft Himalaya"/>
+        <a:font script="Thaa" typeface="MV Boli"/>
+        <a:font script="Deva" typeface="Mangal"/>
+        <a:font script="Telu" typeface="Gautami"/>
+        <a:font script="Taml" typeface="Latha"/>
+        <a:font script="Syrc" typeface="Estrangelo Edessa"/>
+        <a:font script="Orya" typeface="Kalinga"/>
+        <a:font script="Mlym" typeface="Kartika"/>
+        <a:font script="Laoo" typeface="DokChampa"/>
+        <a:font script="Sinh" typeface="Iskoola Pota"/>
+        <a:font script="Mong" typeface="Mongolian Baiti"/>
+        <a:font script="Viet" typeface="Times New Roman"/>
+        <a:font script="Uigh" typeface="Microsoft Uighur"/>
+        <a:font script="Geor" typeface="Sylfaen"/>
+      </a:majorFont>
+      <a:minorFont>
+        <a:latin typeface="Calibri"/>
+        <a:ea typeface=""/>
+        <a:cs typeface=""/>
+        <a:font script="Jpan" typeface="ＭＳ Ｐゴシック"/>
+        <a:font script="Hang" typeface="맑은 고딕"/>
+        <a:font script="Hans" typeface="宋体"/>
+        <a:font script="Hant" typeface="新細明體"/>
+        <a:font script="Arab" typeface="Arial"/>
+        <a:font script="Hebr" typeface="Arial"/>
+        <a:font script="Thai" typeface="Cordia New"/>
+        <a:font script="Ethi" typeface="Nyala"/>
+        <a:font script="Beng" typeface="Vrinda"/>
+        <a:font script="Gujr" typeface="Shruti"/>
+        <a:font script="Khmr" typeface="DaunPenh"/>
+        <a:font script="Knda" typeface="Tunga"/>
+        <a:font script="Guru" typeface="Raavi"/>
+        <a:font script="Cans" typeface="Euphemia"/>
+        <a:font script="Cher" typeface="Plantagenet Cherokee"/>
+        <a:font script="Yiii" typeface="Microsoft Yi Baiti"/>
+        <a:font script="Tibt" typeface="Microsoft Himalaya"/>
+        <a:font script="Thaa" typeface="MV Boli"/>
+        <a:font script="Deva" typeface="Mangal"/>
+        <a:font script="Telu" typeface="Gautami"/>
+        <a:font script="Taml" typeface="Latha"/>
+        <a:font script="Syrc" typeface="Estrangelo Edessa"/>
+        <a:font script="Orya" typeface="Kalinga"/>
+        <a:font script="Mlym" typeface="Kartika"/>
+        <a:font script="Laoo" typeface="DokChampa"/>
+        <a:font script="Sinh" typeface="Iskoola Pota"/>
+        <a:font script="Mong" typeface="Mongolian Baiti"/>
+        <a:font script="Viet" typeface="Arial"/>
+        <a:font script="Uigh" typeface="Microsoft Uighur"/>
+        <a:font script="Geor" typeface="Sylfaen"/>
+      </a:minorFont>
+    </a:fontScheme>
+    <a:fmtScheme name="Office">
+      <a:fillStyleLst>
+        <a:solidFill>
+          <a:schemeClr val="phClr"/>
+        </a:solidFill>
+        <a:gradFill rotWithShape="1">
+          <a:gsLst>
+            <a:gs pos="0">
+              <a:schemeClr val="phClr">
+                <a:tint val="50000"/>
+                <a:satMod val="300000"/>
+              </a:schemeClr>
+            </a:gs>
+            <a:gs pos="35000">
+              <a:schemeClr val="phClr">
+                <a:tint val="37000"/>
+                <a:satMod val="300000"/>
+              </a:schemeClr>
+            </a:gs>
+            <a:gs pos="100000">
+              <a:schemeClr val="phClr">
+                <a:tint val="15000"/>
+                <a:satMod val="350000"/>
+              </a:schemeClr>
+            </a:gs>
+          </a:gsLst>
+          <a:lin ang="16200000" scaled="1"/>
+        </a:gradFill>
+        <a:gradFill rotWithShape="1">
+          <a:gsLst>
+            <a:gs pos="0">
+              <a:schemeClr val="phClr">
+                <a:tint val="100000"/>
+                <a:shade val="100000"/>
+                <a:satMod val="130000"/>
+              </a:schemeClr>
+            </a:gs>
+            <a:gs pos="100000">
+              <a:schemeClr val="phClr">
+                <a:tint val="50000"/>
+                <a:shade val="100000"/>
+                <a:satMod val="350000"/>
+              </a:schemeClr>
+            </a:gs>
+          </a:gsLst>
+          <a:lin ang="16200000" scaled="0"/>
+        </a:gradFill>
+      </a:fillStyleLst>
+      <a:lnStyleLst>
+        <a:ln w="9525" cap="flat" cmpd="sng" algn="ctr">
+          <a:solidFill>
+            <a:schemeClr val="phClr">
+              <a:shade val="95000"/>
+              <a:satMod val="105000"/>
+            </a:schemeClr>
+          </a:solidFill>
+          <a:prstDash val="solid"/>
+        </a:ln>
+        <a:ln w="25400" cap="flat" cmpd="sng" algn="ctr">
+          <a:solidFill>
+            <a:schemeClr val="phClr"/>
+          </a:solidFill>
+          <a:prstDash val="solid"/>
+        </a:ln>
+        <a:ln w="38100" cap="flat" cmpd="sng" algn="ctr">
+          <a:solidFill>
+            <a:schemeClr val="phClr"/>
+          </a:solidFill>
+          <a:prstDash val="solid"/>
+        </a:ln>
+      </a:lnStyleLst>
+      <a:effectStyleLst>
+        <a:effectStyle>
+          <a:effectLst>
+            <a:outerShdw blurRad="40000" dist="20000" dir="5400000" rotWithShape="0">
+              <a:srgbClr val="000000">
+                <a:alpha val="38000"/>
+              </a:srgbClr>
+            </a:outerShdw>
+          </a:effectLst>
+        </a:effectStyle>
+        <a:effectStyle>
+          <a:effectLst>
+            <a:outerShdw blurRad="40000" dist="23000" dir="5400000" rotWithShape="0">
+              <a:srgbClr val="000000">
+                <a:alpha val="35000"/>
+              </a:srgbClr>
+            </a:outerShdw>
+          </a:effectLst>
+        </a:effectStyle>
+        <a:effectStyle>
+          <a:effectLst>
+            <a:outerShdw blurRad="40000" dist="23000" dir="5400000" rotWithShape="0">
+              <a:srgbClr val="000000">
+                <a:alpha val="35000"/>
+              </a:srgbClr>
+            </a:outerShdw>
+          </a:effectLst>
+          <a:scene3d>
+            <a:camera prst="orthographicFront">
+              <a:rot lat="0" lon="0" rev="0"/>
+            </a:camera>
+            <a:lightRig rig="threePt" dir="t">
+              <a:rot lat="0" lon="0" rev="1200000"/>
+            </a:lightRig>
+          </a:scene3d>
+          <a:sp3d>
+            <a:bevelT w="63500" h="25400"/>
+          </a:sp3d>
+        </a:effectStyle>
+      </a:effectStyleLst>
+      <a:bgFillStyleLst>
+        <a:solidFill>
+          <a:schemeClr val="phClr"/>
+        </a:solidFill>
+        <a:gradFill rotWithShape="1">
+          <a:gsLst>
+            <a:gs pos="0">
+              <a:schemeClr val="phClr">
+                <a:tint val="40000"/>
+                <a:satMod val="350000"/>
+              </a:schemeClr>
+            </a:gs>
+            <a:gs pos="40000">
+              <a:schemeClr val="phClr">
+                <a:tint val="45000"/>
+                <a:shade val="99000"/>
+                <a:satMod val="350000"/>
+              </a:schemeClr>
+            </a:gs>
+            <a:gs pos="100000">
+              <a:schemeClr val="phClr">
+                <a:shade val="20000"/>
+                <a:satMod val="255000"/>
+              </a:schemeClr>
+            </a:gs>
+          </a:gsLst>
+          <a:path path="circle">
+            <a:fillToRect l="50000" t="-80000" r="50000" b="180000"/>
+          </a:path>
+        </a:gradFill>
+        <a:gradFill rotWithShape="1">
+          <a:gsLst>
+            <a:gs pos="0">
+              <a:schemeClr val="phClr">
+                <a:tint val="80000"/>
+                <a:satMod val="300000"/>
+              </a:schemeClr>
+            </a:gs>
+            <a:gs pos="100000">
+              <a:schemeClr val="phClr">
+                <a:shade val="30000"/>
+                <a:satMod val="200000"/>
+              </a:schemeClr>
+            </a:gs>
+          </a:gsLst>
+          <a:path path="circle">
+            <a:fillToRect l="50000" t="50000" r="50000" b="50000"/>
+          </a:path>
+        </a:gradFill>
+      </a:bgFillStyleLst>
+    </a:fmtScheme>
+  </a:themeElements>
+  <a:objectDefaults>
+    <a:spDef>
+      <a:spPr/>
+      <a:bodyPr/>
+      <a:lstStyle/>
+      <a:style>
+        <a:lnRef idx="1">
+          <a:schemeClr val="accent1"/>
+        </a:lnRef>
+        <a:fillRef idx="3">
+          <a:schemeClr val="accent1"/>
+        </a:fillRef>
+        <a:effectRef idx="2">
+          <a:schemeClr val="accent1"/>
+        </a:effectRef>
+        <a:fontRef idx="minor">
+          <a:schemeClr val="lt1"/>
+        </a:fontRef>
+      </a:style>
+    </a:spDef>
+    <a:lnDef>
+      <a:spPr/>
+      <a:bodyPr/>
+      <a:lstStyle/>
+      <a:style>
+        <a:lnRef idx="2">
+          <a:schemeClr val="accent1"/>
+        </a:lnRef>
+        <a:fillRef idx="0">
+          <a:schemeClr val="accent1"/>
+        </a:fillRef>
+        <a:effectRef idx="1">
+          <a:schemeClr val="accent1"/>
+        </a:effectRef>
+        <a:fontRef idx="minor">
+          <a:schemeClr val="tx1"/>
+        </a:fontRef>
+      </a:style>
+    </a:lnDef>
+  </a:objectDefaults>
+  <a:extraClrSchemeLst/>
+</a:theme>
+</file>
+
+<file path=ppt/theme/theme2.xml><?xml version="1.0" encoding="utf-8"?>
+<a:theme xmlns:a="http://schemas.openxmlformats.org/drawingml/2006/main" name="Office Theme">
+  <a:themeElements>
+    <a:clrScheme name="Office">
+      <a:dk1>
+        <a:sysClr val="windowText" lastClr="000000"/>
+      </a:dk1>
+      <a:lt1>
+        <a:sysClr val="window" lastClr="FFFFFF"/>
+      </a:lt1>
+      <a:dk2>
+        <a:srgbClr val="1F497D"/>
+      </a:dk2>
+      <a:lt2>
+        <a:srgbClr val="EEECE1"/>
+      </a:lt2>
+      <a:accent1>
+        <a:srgbClr val="4F81BD"/>
+      </a:accent1>
+      <a:accent2>
+        <a:srgbClr val="C0504D"/>
+      </a:accent2>
+      <a:accent3>
+        <a:srgbClr val="9BBB59"/>
+      </a:accent3>
+      <a:accent4>
+        <a:srgbClr val="8064A2"/>
+      </a:accent4>
+      <a:accent5>
+        <a:srgbClr val="4BACC6"/>
+      </a:accent5>
+      <a:accent6>
+        <a:srgbClr val="F79646"/>
+      </a:accent6>
+      <a:hlink>
+        <a:srgbClr val="0000FF"/>
+      </a:hlink>
+      <a:folHlink>
+        <a:srgbClr val="800080"/>
+      </a:folHlink>
+    </a:clrScheme>
+    <a:fontScheme name="Office">
+      <a:majorFont>
+        <a:latin typeface="Calibri"/>
         <a:ea typeface=""/>
         <a:cs typeface=""/>
         <a:font script="Jpan" typeface="ＭＳ Ｐゴシック"/>
